--- a/docs/CuentaVoz_Colsubsidio_V2.pptx
+++ b/docs/CuentaVoz_Colsubsidio_V2.pptx
@@ -3617,7 +3617,7 @@
                 <a:ea typeface="Calibri" pitchFamily="34" charset="-122"/>
                 <a:cs typeface="Calibri" pitchFamily="34" charset="-120"/>
               </a:rPr>
-              <a:t>Render con HTTPS y monitoreo de errores en Sentry — cuentavoz.onrender.com responde hoy.</a:t>
+              <a:t>AWS con HTTPS por CloudFront. Cada cambio pasa por 149 pruebas automáticas antes de desplegarse.</a:t>
             </a:r>
             <a:endParaRPr lang="en-US" sz="1150" dirty="0"/>
           </a:p>
@@ -5092,7 +5092,7 @@
                 <a:ea typeface="Calibri" pitchFamily="34" charset="-122"/>
                 <a:cs typeface="Calibri" pitchFamily="34" charset="-120"/>
               </a:rPr>
-              <a:t>Dos servicios en Render — sitio estático y backend. Sin servidores propios que mantener.</a:t>
+              <a:t>Infraestructura gestionada en AWS: S3, CloudFront, EC2 y RDS. La misma nube que ya usa Colsubsidio.</a:t>
             </a:r>
             <a:endParaRPr lang="en-US" sz="1050" dirty="0"/>
           </a:p>
@@ -6454,7 +6454,7 @@
                 <a:ea typeface="Calibri" pitchFamily="34" charset="-122"/>
                 <a:cs typeface="Calibri" pitchFamily="34" charset="-120"/>
               </a:rPr>
-              <a:t>Desplegado en Render — cuentavoz.onrender.com</a:t>
+              <a:t>Desplegado en AWS con despliegue automático desde GitHub</a:t>
             </a:r>
             <a:endParaRPr lang="en-US" sz="1100" dirty="0"/>
           </a:p>
@@ -9686,7 +9686,7 @@
                 <a:ea typeface="Calibri" pitchFamily="34" charset="-122"/>
                 <a:cs typeface="Calibri" pitchFamily="34" charset="-120"/>
               </a:rPr>
-              <a:t>cuentavoz.onrender.com</a:t>
+              <a:t>d13g9u0pgpag0b.cloudfront.net</a:t>
             </a:r>
             <a:endParaRPr lang="en-US" sz="1350" dirty="0"/>
           </a:p>
@@ -10013,7 +10013,7 @@
                 <a:ea typeface="Calibri" pitchFamily="34" charset="-122"/>
                 <a:cs typeface="Calibri" pitchFamily="34" charset="-120"/>
               </a:rPr>
-              <a:t>Usuarios de prueba: luis / diana  ·  PIN: StockXperts</a:t>
+              <a:t>Usuarios de prueba: luis / diana  ·  Clave: StockXperts1</a:t>
             </a:r>
             <a:endParaRPr lang="en-US" sz="1100" dirty="0"/>
           </a:p>
@@ -15706,7 +15706,7 @@
                 <a:ea typeface="Calibri" pitchFamily="34" charset="-122"/>
                 <a:cs typeface="Calibri" pitchFamily="34" charset="-120"/>
               </a:rPr>
-              <a:t>Capturas reales de producción — cuentavoz.onrender.com, no una maqueta</a:t>
+              <a:t>Capturas reales de producción en AWS — no una maqueta</a:t>
             </a:r>
             <a:endParaRPr lang="en-US" sz="1400" dirty="0"/>
           </a:p>
@@ -17294,7 +17294,7 @@
                 <a:ea typeface="Calibri" pitchFamily="34" charset="-122"/>
                 <a:cs typeface="Calibri" pitchFamily="34" charset="-120"/>
               </a:rPr>
-              <a:t>Dos servicios desplegados por separado en Render, con Gemini como cerebro</a:t>
+              <a:t>Desplegado en AWS con despliegue automático, y Gemini como cerebro</a:t>
             </a:r>
             <a:endParaRPr lang="en-US" sz="1400" dirty="0"/>
           </a:p>
@@ -17610,7 +17610,7 @@
                 <a:ea typeface="Calibri" pitchFamily="34" charset="-122"/>
                 <a:cs typeface="Calibri" pitchFamily="34" charset="-120"/>
               </a:rPr>
-              <a:t>Static Site · Render</a:t>
+              <a:t>S3 + CloudFront</a:t>
             </a:r>
             <a:endParaRPr lang="en-US" sz="1000" dirty="0"/>
           </a:p>
@@ -17768,7 +17768,7 @@
                 <a:ea typeface="Calibri" pitchFamily="34" charset="-122"/>
                 <a:cs typeface="Calibri" pitchFamily="34" charset="-120"/>
               </a:rPr>
-              <a:t>Web Service · Render</a:t>
+              <a:t>EC2 + Docker · ECR</a:t>
             </a:r>
             <a:endParaRPr lang="en-US" sz="1000" dirty="0"/>
           </a:p>
@@ -18000,7 +18000,7 @@
                 <a:ea typeface="Calibri" pitchFamily="34" charset="-122"/>
                 <a:cs typeface="Calibri" pitchFamily="34" charset="-120"/>
               </a:rPr>
-              <a:t>PostgreSQL</a:t>
+              <a:t>PostgreSQL · RDS</a:t>
             </a:r>
             <a:endParaRPr lang="en-US" sz="1150" dirty="0"/>
           </a:p>
@@ -18833,7 +18833,7 @@
                 <a:ea typeface="Calibri" pitchFamily="34" charset="-122"/>
                 <a:cs typeface="Calibri" pitchFamily="34" charset="-120"/>
               </a:rPr>
-              <a:t>Render</a:t>
+              <a:t>AWS</a:t>
             </a:r>
             <a:endParaRPr lang="en-US" sz="1100" dirty="0"/>
           </a:p>

--- a/docs/CuentaVoz_Colsubsidio_V2.pptx
+++ b/docs/CuentaVoz_Colsubsidio_V2.pptx
@@ -452,8 +452,29 @@
           <a:lstStyle/>
           <a:p>
             <a:r>
-              <a:rPr lang="en-US" dirty="0"/>
-              <a:t>PITCH DE 5:00–5:30 · 0:00–0:05 (5s) — Preséntense en una frase: 'Somos StockXperts, esto es CuentaVoz.' No se detengan aquí, es solo la entrada.</a:t>
+              <a:t>LUIS  ·  0:20  ·  acumulado 0:20</a:t>
+            </a:r>
+          </a:p>
+          <a:p/>
+          <a:p>
+            <a:r>
+              <a:t>Buenos días. Somos StockXperts. Yo soy Luis, ella es Diana.</a:t>
+            </a:r>
+          </a:p>
+          <a:p>
+            <a:r>
+              <a:t>Traemos CuentaVoz: contar el inventario hablando, en vez de escribiendo.</a:t>
+            </a:r>
+          </a:p>
+          <a:p>
+            <a:r>
+              <a:t>En diez minutos se lo mostramos funcionando con los datos reales de ustedes.</a:t>
+            </a:r>
+          </a:p>
+          <a:p/>
+          <a:p>
+            <a:r>
+              <a:t>&gt; No lea la diapositiva: ya se ve.</a:t>
             </a:r>
           </a:p>
         </p:txBody>
@@ -539,8 +560,24 @@
           <a:lstStyle/>
           <a:p>
             <a:r>
-              <a:rPr lang="en-US" dirty="0"/>
-              <a:t>3:25–3:35 (10s) — Una frase: 'Ya tiene cifrado, huella digital, funciona sin internet.' SE PUEDE SALTAR COMPLETA si van cortos de tiempo.</a:t>
+              <a:t>LUIS  ·  0:30  ·  acumulado 7:10</a:t>
+            </a:r>
+          </a:p>
+          <a:p/>
+          <a:p>
+            <a:r>
+              <a:t>La identidad la maneja AWS Cognito, con verificación en dos pasos opcional. La clave nunca pasa por nuestro servidor.</a:t>
+            </a:r>
+          </a:p>
+          <a:p>
+            <a:r>
+              <a:t>Y nada se borra: una corrección crea un registro nuevo que apunta al original. La trazabilidad es completa.</a:t>
+            </a:r>
+          </a:p>
+          <a:p/>
+          <a:p>
+            <a:r>
+              <a:t>&gt; Al terminar esta lámina deberían ir en 7:10.</a:t>
             </a:r>
           </a:p>
         </p:txBody>
@@ -626,8 +663,24 @@
           <a:lstStyle/>
           <a:p>
             <a:r>
-              <a:rPr lang="en-US" dirty="0"/>
-              <a:t>3:35–3:55 (20s) — Menos error, más trazabilidad, escala a las 54 bodegas.</a:t>
+              <a:t>LUIS  ·  0:30  ·  acumulado 7:40</a:t>
+            </a:r>
+          </a:p>
+          <a:p/>
+          <a:p>
+            <a:r>
+              <a:t>Decisiones con datos reales, no con memoria ni planillas sueltas.</a:t>
+            </a:r>
+          </a:p>
+          <a:p>
+            <a:r>
+              <a:t>El auxiliar recupera tiempo, el administrador ve el estado en vivo.</a:t>
+            </a:r>
+          </a:p>
+          <a:p/>
+          <a:p>
+            <a:r>
+              <a:t>&gt; Una sola idea. No enumere las tres viñetas: escoja la que más le importe a quien tiene enfrente.</a:t>
             </a:r>
           </a:p>
         </p:txBody>
@@ -713,8 +766,13 @@
           <a:lstStyle/>
           <a:p>
             <a:r>
-              <a:rPr lang="en-US" dirty="0"/>
-              <a:t>3:55–4:10 (15s) — 'No hay licencias por usuario, se paga por uso de IA — bajo costo, alto impacto.' SE PUEDE SALTAR si van cortos.</a:t>
+              <a:t>DIANA  ·  0:30  ·  acumulado 8:10</a:t>
+            </a:r>
+          </a:p>
+          <a:p/>
+          <a:p>
+            <a:r>
+              <a:t>No hay licencias por usuario. Sumar una bodega o veinte personas más no cuesta más. Se paga la infraestructura y el consumo de la IA por uso.</a:t>
             </a:r>
           </a:p>
         </p:txBody>
@@ -800,8 +858,23 @@
           <a:lstStyle/>
           <a:p>
             <a:r>
-              <a:rPr lang="en-US" dirty="0"/>
-              <a:t>4:10–4:25 (15s) — 'Ya está en producción. El siguiente paso es un piloto real con ustedes.'</a:t>
+              <a:t>DIANA  ·  0:30  ·  acumulado 8:40</a:t>
+            </a:r>
+          </a:p>
+          <a:p/>
+          <a:p>
+            <a:r>
+              <a:t>Hoy: prototipo real desplegado y funcionando.</a:t>
+            </a:r>
+          </a:p>
+          <a:p>
+            <a:r>
+              <a:t>Próximo paso: cargar el archivo oficial de recetas y un piloto guiado en un grupo de bodegas.</a:t>
+            </a:r>
+          </a:p>
+          <a:p>
+            <a:r>
+              <a:t>Visión: toda la operación de hotelería, integrada con My Inventory.</a:t>
             </a:r>
           </a:p>
         </p:txBody>
@@ -887,8 +960,24 @@
           <a:lstStyle/>
           <a:p>
             <a:r>
-              <a:rPr lang="en-US" dirty="0"/>
-              <a:t>4:25–4:50 (25s) — EL ASK. NUNCA SE SALTA — esto es lo que se llevan los gerentes: un sponsor, el archivo de recetas, un grupo de bodegas para el piloto, 30 min cada 2 semanas.</a:t>
+              <a:t>LUIS  ·  0:40  ·  acumulado 9:20</a:t>
+            </a:r>
+          </a:p>
+          <a:p/>
+          <a:p>
+            <a:r>
+              <a:t>Para pasar del prototipo al piloto necesitamos cuatro cosas concretas: un SPONSOR dentro de Operaciones, un GRUPO DE BODEGAS para el piloto, el ARCHIVO OFICIAL DE RECETAS, y ACCESO A MY INVENTORY para cerrar el ciclo.</a:t>
+            </a:r>
+          </a:p>
+          <a:p/>
+          <a:p>
+            <a:r>
+              <a:t>&gt; ESTA LÁMINA NO SE SACRIFICA. Si va corto, recorte la 11 o la 12, nunca esta.</a:t>
+            </a:r>
+          </a:p>
+          <a:p>
+            <a:r>
+              <a:t>&gt; Mire a la persona que puede decir que sí.</a:t>
             </a:r>
           </a:p>
         </p:txBody>
@@ -974,8 +1063,13 @@
           <a:lstStyle/>
           <a:p>
             <a:r>
-              <a:rPr lang="en-US" dirty="0"/>
-              <a:t>4:50–5:00 (10s) — Nombres rápido, una frase de rol cada uno.</a:t>
+              <a:t>DIANA  ·  0:15  ·  acumulado 9:35</a:t>
+            </a:r>
+          </a:p>
+          <a:p/>
+          <a:p>
+            <a:r>
+              <a:t>Somos el equipo StockXperts. Esto lo construimos nosotros, de cero.</a:t>
             </a:r>
           </a:p>
         </p:txBody>
@@ -1061,9 +1155,19 @@
           <a:lstStyle/>
           <a:p>
             <a:r>
-              <a:rPr lang="en-US" dirty="0"/>
-              <a:t>5:00–5:10 (10s) — 'Muchas gracias por su tiempo. Quedamos atentos a sus preguntas — pueden escanear el código QR para explorar la demo ustedes mismos, y escribirnos directamente por WhatsApp al 313 389 8638.' Cierren con energía. NUNCA SE SALTA.
-RESUMEN DE TIEMPOS (total ~5:10, deja margen a 5:30): slides 2,3,6,9,14,16 nunca se saltan (son el hook, la solución, la demo, los datos reales, el ask y el cierre). Si van cortos, salten o abrevien 4, 5, 7, 10 y 12 en ese orden de prioridad.</a:t>
+              <a:t>LUIS  ·  0:15  ·  acumulado 9:50</a:t>
+            </a:r>
+          </a:p>
+          <a:p/>
+          <a:p>
+            <a:r>
+              <a:t>Ahí está la dirección para que lo prueben ustedes mismos, con estas cuentas. Quedamos atentos a sus preguntas.</a:t>
+            </a:r>
+          </a:p>
+          <a:p/>
+          <a:p>
+            <a:r>
+              <a:t>&gt; Deje esta lámina puesta durante las preguntas: tiene la URL, las cuentas y el contacto.</a:t>
             </a:r>
           </a:p>
         </p:txBody>
@@ -1149,8 +1253,24 @@
           <a:lstStyle/>
           <a:p>
             <a:r>
-              <a:rPr lang="en-US" dirty="0"/>
-              <a:t>0:05–0:30 (25s) — HOOK + PROBLEMA. Mencionen 1-2 ejemplos rápido (el 9 registrado como 90, o la unidad confundida) — no lean las 4 tarjetas completas. NUNCA SE SALTA.</a:t>
+              <a:t>LUIS  ·  0:40  ·  acumulado 1:00</a:t>
+            </a:r>
+          </a:p>
+          <a:p/>
+          <a:p>
+            <a:r>
+              <a:t>Hoy el inventario de una bodega se toma en papel. Alguien camina con una planilla, anota, y después otra persona lo digita en el sistema.</a:t>
+            </a:r>
+          </a:p>
+          <a:p>
+            <a:r>
+              <a:t>Eso tiene tres costos: TIEMPO —se hace dos veces—, ERRORES —de letra, de digitación— y DEMORA: la diferencia se descubre semanas después, cuando ya nadie se acuerda de qué pasó.</a:t>
+            </a:r>
+          </a:p>
+          <a:p/>
+          <a:p>
+            <a:r>
+              <a:t>&gt; Pausa corta antes de pasar.</a:t>
             </a:r>
           </a:p>
         </p:txBody>
@@ -1236,8 +1356,23 @@
           <a:lstStyle/>
           <a:p>
             <a:r>
-              <a:rPr lang="en-US" dirty="0"/>
-              <a:t>0:30–0:50 (20s) — QUÉ CONSTRUIMOS. 'Construimos CuentaVoz: usted habla, la IA entiende, el sistema valida y registra solo — sin papel, sin doble digitación.' NUNCA SE SALTA.</a:t>
+              <a:t>LUIS  ·  0:30  ·  acumulado 1:30</a:t>
+            </a:r>
+          </a:p>
+          <a:p/>
+          <a:p>
+            <a:r>
+              <a:t>Voz, inteligencia artificial y validaciones automáticas.</a:t>
+            </a:r>
+          </a:p>
+          <a:p>
+            <a:r>
+              <a:t>La persona habla, el sistema entiende, valida contra el inventario y guarda.</a:t>
+            </a:r>
+          </a:p>
+          <a:p>
+            <a:r>
+              <a:t>Una sola vez, en el sitio, y validado en el momento.</a:t>
             </a:r>
           </a:p>
         </p:txBody>
@@ -1323,8 +1458,24 @@
           <a:lstStyle/>
           <a:p>
             <a:r>
-              <a:rPr lang="en-US" dirty="0"/>
-              <a:t>0:50–1:10 (20s) — Si van cortos de tiempo, SE PUEDE SALTAR: solo digan una frase de transición ('el agente propone, el backend decide') y sigan.</a:t>
+              <a:t>DIANA  ·  0:40  ·  acumulado 2:10</a:t>
+            </a:r>
+          </a:p>
+          <a:p/>
+          <a:p>
+            <a:r>
+              <a:t>Cada vez que alguien habla pasan cinco pasos: escucha, interpreta, resuelve el artículo contra el catálogo oficial, valida y confirma.</a:t>
+            </a:r>
+          </a:p>
+          <a:p>
+            <a:r>
+              <a:t>Y algo importante: el modelo interpreta, pero el que decide es el backend. La inteligencia artificial no escribe en la base de datos — propone, y unas reglas en código deciden si eso entra o no.</a:t>
+            </a:r>
+          </a:p>
+          <a:p/>
+          <a:p>
+            <a:r>
+              <a:t>&gt; Ese matiz tranquiliza a quien pregunta por confiabilidad de la IA.</a:t>
             </a:r>
           </a:p>
         </p:txBody>
@@ -1410,8 +1561,24 @@
           <a:lstStyle/>
           <a:p>
             <a:r>
-              <a:rPr lang="en-US" dirty="0"/>
-              <a:t>1:10–1:25 (15s) — Mencionen rápido que cubre pedido, conteo y legalización — no se detengan en cada tarjeta. SE PUEDE SALTAR si van cortos.</a:t>
+              <a:t>DIANA  ·  0:40  ·  acumulado 2:50</a:t>
+            </a:r>
+          </a:p>
+          <a:p/>
+          <a:p>
+            <a:r>
+              <a:t>No es solo contar. Son los tres momentos del ciclo: el PEDIDO al almacén calculado por receta, el CONTEO de la bodega, y la LEGALIZACIÓN del servicio al final del turno.</a:t>
+            </a:r>
+          </a:p>
+          <a:p>
+            <a:r>
+              <a:t>Todo sin salir de la misma aplicación, con la misma voz.</a:t>
+            </a:r>
+          </a:p>
+          <a:p/>
+          <a:p>
+            <a:r>
+              <a:t>&gt; Al terminar esta lámina deberían ir en 2:50.</a:t>
             </a:r>
           </a:p>
         </p:txBody>
@@ -1497,8 +1664,80 @@
           <a:lstStyle/>
           <a:p>
             <a:r>
-              <a:rPr lang="en-US" dirty="0"/>
-              <a:t>1:25–2:25 (60s) — DEMO EN VIVO, la parte más importante. Aquí PAUSEN las diapositivas: saquen la tablet y hagan un conteo de verdad hablándole al agente; si el público tiene celular a mano, que abran cuentavoz.onrender.com y sigan en vivo (usuario luis/diana, PIN StockXperts). Esta slide con las capturas queda de RESPALDO si falla el wifi de la sede — no lean las descripciones, salten directo a la app real. NUNCA SE SALTA.</a:t>
+              <a:t>LUIS cuenta · DIANA cierra  ·  2:00  ·  acumulado 4:50</a:t>
+            </a:r>
+          </a:p>
+          <a:p/>
+          <a:p>
+            <a:r>
+              <a:t>LUIS (1:10) — como auxiliar:</a:t>
+            </a:r>
+          </a:p>
+          <a:p>
+            <a:r>
+              <a:t>1. Entro como auxiliar. Solo veo MIS bodegas asignadas, ninguna más.</a:t>
+            </a:r>
+          </a:p>
+          <a:p>
+            <a:r>
+              <a:t>2. Abre una bodega. «Ya está abierta, con sus 133 referencias.»</a:t>
+            </a:r>
+          </a:p>
+          <a:p>
+            <a:r>
+              <a:t>3. Toca el micrófono y dicta despacio: «papa criolla veinte kilos».</a:t>
+            </a:r>
+          </a:p>
+          <a:p>
+            <a:r>
+              <a:t>4. Me repite lo que entendió y me pide confirmar. → confirma.</a:t>
+            </a:r>
+          </a:p>
+          <a:p>
+            <a:r>
+              <a:t>5. Si sale diferencia: «Aquí me avisa que el sistema esperaba otra cantidad. ESTO es el hallazgo: se ve ahora, no en tres semanas.»</a:t>
+            </a:r>
+          </a:p>
+          <a:p>
+            <a:r>
+              <a:t>6. Cuando termino, firmo mi conteo. → «Terminar y firmar mi conteo».</a:t>
+            </a:r>
+          </a:p>
+          <a:p/>
+          <a:p>
+            <a:r>
+              <a:t>DIANA (0:50) — como administradora:</a:t>
+            </a:r>
+          </a:p>
+          <a:p>
+            <a:r>
+              <a:t>7. Yo recibo esa bodega firmada y hago el RECUENTO CIEGO: cuento sin ver sus números.</a:t>
+            </a:r>
+          </a:p>
+          <a:p>
+            <a:r>
+              <a:t>8. Muestra la comparación: «aquí se revelan las tres columnas: el sistema, lo que contó Luis, lo que conté yo».</a:t>
+            </a:r>
+          </a:p>
+          <a:p>
+            <a:r>
+              <a:t>9. Y se cierra con DOBLE FIRMA. Ninguno de los dos puede cerrar solo.</a:t>
+            </a:r>
+          </a:p>
+          <a:p/>
+          <a:p>
+            <a:r>
+              <a:t>&gt; NO use las capturas: abra la tableta.</a:t>
+            </a:r>
+          </a:p>
+          <a:p>
+            <a:r>
+              <a:t>&gt; Si el micrófono falla, toque Teclado y escriba la misma frase. Es el respaldo real de la aplicación, no una excusa: dígalo así, «funciona en una bodega con ruido».</a:t>
+            </a:r>
+          </a:p>
+          <a:p>
+            <a:r>
+              <a:t>&gt; CORTE: si a los 5:00 no han salido de la demo, córtenla y sigan.</a:t>
             </a:r>
           </a:p>
         </p:txBody>
@@ -1584,8 +1823,18 @@
           <a:lstStyle/>
           <a:p>
             <a:r>
-              <a:rPr lang="en-US" dirty="0"/>
-              <a:t>2:25–2:45 (20s) — Un solo ejemplo fuerte: 'noventa cazuelas' dispara '¿confirma 90?'. No lean las 4 tarjetas. SE PUEDE ABREVIAR a una frase si la demo en vivo se alargó.</a:t>
+              <a:t>LUIS  ·  0:40  ·  acumulado 5:30</a:t>
+            </a:r>
+          </a:p>
+          <a:p/>
+          <a:p>
+            <a:r>
+              <a:t>Lo que acaban de ver validó cuatro cosas sin que yo hiciera nada: que el artículo existe en el catálogo, que la unidad es la correcta, que la cantidad tiene sentido, y que yo tenía permiso sobre esa bodega.</a:t>
+            </a:r>
+          </a:p>
+          <a:p>
+            <a:r>
+              <a:t>Si algo no cuadra, el conteo NO se detiene: queda marcado y sigue.</a:t>
             </a:r>
           </a:p>
         </p:txBody>
@@ -1671,8 +1920,24 @@
           <a:lstStyle/>
           <a:p>
             <a:r>
-              <a:rPr lang="en-US" dirty="0"/>
-              <a:t>2:45–3:00 (15s) — TECH STACK en una frase: React, FastAPI, PostgreSQL, Gemini, todo en producción en Render. No se detengan en el diagrama completo.</a:t>
+              <a:t>DIANA  ·  0:40  ·  acumulado 6:10</a:t>
+            </a:r>
+          </a:p>
+          <a:p/>
+          <a:p>
+            <a:r>
+              <a:t>Está en AWS: el frontend en S3 con CloudFront, el backend en EC2 con Docker, la base en RDS. La misma nube que ya usa Colsubsidio, así que no hay nada que migrar.</a:t>
+            </a:r>
+          </a:p>
+          <a:p>
+            <a:r>
+              <a:t>Y cada cambio pasa por 149 pruebas automáticas antes de desplegarse. Si una falla, no llega a producción.</a:t>
+            </a:r>
+          </a:p>
+          <a:p/>
+          <a:p>
+            <a:r>
+              <a:t>&gt; Es la lámina donde más preguntan. No se extienda: si preguntan, hay tiempo al final.</a:t>
             </a:r>
           </a:p>
         </p:txBody>
@@ -1758,8 +2023,18 @@
           <a:lstStyle/>
           <a:p>
             <a:r>
-              <a:rPr lang="en-US" dirty="0"/>
-              <a:t>3:00–3:25 (25s) — Estos números importan: 54 bodegas, 1.040 artículos, 88.2% de exactitud — con el archivo real que entregó Colsubsidio, no una demo inventada. NUNCA SE SALTA.</a:t>
+              <a:t>DIANA  ·  0:30  ·  acumulado 6:40</a:t>
+            </a:r>
+          </a:p>
+          <a:p/>
+          <a:p>
+            <a:r>
+              <a:t>Nada de esto es una maqueta: son las 54 bodegas de ustedes, 1.041 artículos del catálogo oficial y 1.405 registros de stock.</a:t>
+            </a:r>
+          </a:p>
+          <a:p>
+            <a:r>
+              <a:t>Al cargarlo, el sistema encontró 79 saldos negativos — inventario que el sistema dice tener en menos que cero.</a:t>
             </a:r>
           </a:p>
         </p:txBody>

--- a/docs/CuentaVoz_Colsubsidio_V2.pptx
+++ b/docs/CuentaVoz_Colsubsidio_V2.pptx
@@ -452,13 +452,13 @@
           <a:lstStyle/>
           <a:p>
             <a:r>
-              <a:t>LUIS  ·  0:20  ·  acumulado 0:20</a:t>
+              <a:t>DIANA  ·  0:20  ·  acumulado 0:20</a:t>
             </a:r>
           </a:p>
           <a:p/>
           <a:p>
             <a:r>
-              <a:t>Buenos días. Somos StockXperts. Yo soy Luis, ella es Diana.</a:t>
+              <a:t>Buenos días. Somos StockXperts. Yo soy Diana, él es Luis.</a:t>
             </a:r>
           </a:p>
           <a:p>
@@ -560,7 +560,7 @@
           <a:lstStyle/>
           <a:p>
             <a:r>
-              <a:t>LUIS  ·  0:30  ·  acumulado 7:10</a:t>
+              <a:t>DIANA  ·  0:30  ·  acumulado 7:10</a:t>
             </a:r>
           </a:p>
           <a:p/>
@@ -663,7 +663,7 @@
           <a:lstStyle/>
           <a:p>
             <a:r>
-              <a:t>LUIS  ·  0:30  ·  acumulado 7:40</a:t>
+              <a:t>DIANA  ·  0:30  ·  acumulado 7:40</a:t>
             </a:r>
           </a:p>
           <a:p/>
@@ -766,7 +766,7 @@
           <a:lstStyle/>
           <a:p>
             <a:r>
-              <a:t>DIANA  ·  0:30  ·  acumulado 8:10</a:t>
+              <a:t>LUIS  ·  0:30  ·  acumulado 8:10</a:t>
             </a:r>
           </a:p>
           <a:p/>
@@ -858,7 +858,7 @@
           <a:lstStyle/>
           <a:p>
             <a:r>
-              <a:t>DIANA  ·  0:30  ·  acumulado 8:40</a:t>
+              <a:t>LUIS  ·  0:30  ·  acumulado 8:40</a:t>
             </a:r>
           </a:p>
           <a:p/>
@@ -960,7 +960,7 @@
           <a:lstStyle/>
           <a:p>
             <a:r>
-              <a:t>LUIS  ·  0:40  ·  acumulado 9:20</a:t>
+              <a:t>DIANA  ·  0:40  ·  acumulado 9:20</a:t>
             </a:r>
           </a:p>
           <a:p/>
@@ -1063,7 +1063,7 @@
           <a:lstStyle/>
           <a:p>
             <a:r>
-              <a:t>DIANA  ·  0:15  ·  acumulado 9:35</a:t>
+              <a:t>LUIS  ·  0:15  ·  acumulado 9:35</a:t>
             </a:r>
           </a:p>
           <a:p/>
@@ -1155,7 +1155,7 @@
           <a:lstStyle/>
           <a:p>
             <a:r>
-              <a:t>LUIS  ·  0:15  ·  acumulado 9:50</a:t>
+              <a:t>DIANA  ·  0:15  ·  acumulado 9:50</a:t>
             </a:r>
           </a:p>
           <a:p/>
@@ -1253,7 +1253,7 @@
           <a:lstStyle/>
           <a:p>
             <a:r>
-              <a:t>LUIS  ·  0:40  ·  acumulado 1:00</a:t>
+              <a:t>DIANA  ·  0:40  ·  acumulado 1:00</a:t>
             </a:r>
           </a:p>
           <a:p/>
@@ -1356,7 +1356,7 @@
           <a:lstStyle/>
           <a:p>
             <a:r>
-              <a:t>LUIS  ·  0:30  ·  acumulado 1:30</a:t>
+              <a:t>DIANA  ·  0:30  ·  acumulado 1:30</a:t>
             </a:r>
           </a:p>
           <a:p/>
@@ -1458,7 +1458,7 @@
           <a:lstStyle/>
           <a:p>
             <a:r>
-              <a:t>DIANA  ·  0:40  ·  acumulado 2:10</a:t>
+              <a:t>LUIS  ·  0:40  ·  acumulado 2:10</a:t>
             </a:r>
           </a:p>
           <a:p/>
@@ -1561,7 +1561,7 @@
           <a:lstStyle/>
           <a:p>
             <a:r>
-              <a:t>DIANA  ·  0:40  ·  acumulado 2:50</a:t>
+              <a:t>LUIS  ·  0:40  ·  acumulado 2:50</a:t>
             </a:r>
           </a:p>
           <a:p/>
@@ -1823,7 +1823,7 @@
           <a:lstStyle/>
           <a:p>
             <a:r>
-              <a:t>LUIS  ·  0:40  ·  acumulado 5:30</a:t>
+              <a:t>DIANA  ·  0:40  ·  acumulado 5:30</a:t>
             </a:r>
           </a:p>
           <a:p/>
@@ -1920,7 +1920,7 @@
           <a:lstStyle/>
           <a:p>
             <a:r>
-              <a:t>DIANA  ·  0:40  ·  acumulado 6:10</a:t>
+              <a:t>LUIS  ·  0:40  ·  acumulado 6:10</a:t>
             </a:r>
           </a:p>
           <a:p/>
@@ -2023,7 +2023,7 @@
           <a:lstStyle/>
           <a:p>
             <a:r>
-              <a:t>DIANA  ·  0:30  ·  acumulado 6:40</a:t>
+              <a:t>LUIS  ·  0:30  ·  acumulado 6:40</a:t>
             </a:r>
           </a:p>
           <a:p/>
@@ -20210,7 +20210,7 @@
                 </a:solidFill>
                 <a:latin typeface="Aptos Display"/>
               </a:rPr>
-              <a:t>1.418</a:t>
+              <a:t>1.405</a:t>
             </a:r>
           </a:p>
         </p:txBody>

--- a/docs/CuentaVoz_Colsubsidio_V2.pptx
+++ b/docs/CuentaVoz_Colsubsidio_V2.pptx
@@ -10393,16 +10393,55 @@
           </a:p>
         </p:txBody>
       </p:sp>
+      <p:sp>
+        <p:nvSpPr>
+          <p:cNvPr id="28" name="Text 20"/>
+          <p:cNvSpPr/>
+          <p:nvPr/>
+        </p:nvSpPr>
+        <p:spPr>
+          <a:xfrm>
+            <a:off x="9482328" y="3163824"/>
+            <a:ext cx="2066544" cy="320040"/>
+          </a:xfrm>
+          <a:prstGeom prst="rect">
+            <a:avLst/>
+          </a:prstGeom>
+          <a:noFill/>
+          <a:ln/>
+        </p:spPr>
+        <p:txBody>
+          <a:bodyPr wrap="square" lIns="0" tIns="0" rIns="0" bIns="0" rtlCol="0" anchor="ctr"/>
+          <a:lstStyle/>
+          <a:p>
+            <a:pPr marL="0" indent="0" algn="ctr">
+              <a:buNone/>
+            </a:pPr>
+            <a:r>
+              <a:rPr lang="en-US" sz="1050" b="1" dirty="0">
+                <a:solidFill>
+                  <a:srgbClr val="10294C"/>
+                </a:solidFill>
+                <a:latin typeface="Calibri" pitchFamily="34" charset="0"/>
+                <a:ea typeface="Calibri" pitchFamily="34" charset="-122"/>
+                <a:cs typeface="Calibri" pitchFamily="34" charset="-120"/>
+              </a:rPr>
+              <a:t>Escanea y pruébelo</a:t>
+            </a:r>
+            <a:endParaRPr lang="en-US" sz="1050" dirty="0"/>
+          </a:p>
+        </p:txBody>
+      </p:sp>
       <p:pic>
         <p:nvPicPr>
-          <p:cNvPr id="27" name="Image 5" descr="/tmp/claude-0/-home-user-cuentavoz/fdf2c082-f526-5e3d-b5a9-2784467fe58c/scratchpad/pitch/icons/qr_demo.png"/>
+          <p:cNvPr id="29" name="Picture 28" descr="_qr_tmp.png"/>
           <p:cNvPicPr>
             <a:picLocks noChangeAspect="1"/>
           </p:cNvPicPr>
           <p:nvPr/>
         </p:nvPicPr>
         <p:blipFill>
-          <a:blip r:embed="rId8"/>
+          <a:blip r:embed="rId9"/>
           <a:stretch>
             <a:fillRect/>
           </a:stretch>
@@ -10417,45 +10456,6 @@
           </a:prstGeom>
         </p:spPr>
       </p:pic>
-      <p:sp>
-        <p:nvSpPr>
-          <p:cNvPr id="28" name="Text 20"/>
-          <p:cNvSpPr/>
-          <p:nvPr/>
-        </p:nvSpPr>
-        <p:spPr>
-          <a:xfrm>
-            <a:off x="9482328" y="3163824"/>
-            <a:ext cx="2066544" cy="320040"/>
-          </a:xfrm>
-          <a:prstGeom prst="rect">
-            <a:avLst/>
-          </a:prstGeom>
-          <a:noFill/>
-          <a:ln/>
-        </p:spPr>
-        <p:txBody>
-          <a:bodyPr wrap="square" lIns="0" tIns="0" rIns="0" bIns="0" rtlCol="0" anchor="ctr"/>
-          <a:lstStyle/>
-          <a:p>
-            <a:pPr marL="0" indent="0" algn="ctr">
-              <a:buNone/>
-            </a:pPr>
-            <a:r>
-              <a:rPr lang="en-US" sz="1050" b="1" dirty="0">
-                <a:solidFill>
-                  <a:srgbClr val="10294C"/>
-                </a:solidFill>
-                <a:latin typeface="Calibri" pitchFamily="34" charset="0"/>
-                <a:ea typeface="Calibri" pitchFamily="34" charset="-122"/>
-                <a:cs typeface="Calibri" pitchFamily="34" charset="-120"/>
-              </a:rPr>
-              <a:t>Escanea y pruébelo</a:t>
-            </a:r>
-            <a:endParaRPr lang="en-US" sz="1050" dirty="0"/>
-          </a:p>
-        </p:txBody>
-      </p:sp>
     </p:spTree>
   </p:cSld>
   <p:clrMapOvr>
